--- a/Arithmetic_LLM-Presentation.pptx
+++ b/Arithmetic_LLM-Presentation.pptx
@@ -280,7 +280,7 @@
           <a:p>
             <a:fld id="{72621FBC-5939-44D6-9C79-53F483794276}" type="datetimeFigureOut">
               <a:rPr lang="zh-CN" altLang="en-US" smtClean="0"/>
-              <a:t>2026/3/2</a:t>
+              <a:t>2026/3/4</a:t>
             </a:fld>
             <a:endParaRPr lang="zh-CN" altLang="en-US"/>
           </a:p>
@@ -457,7 +457,7 @@
           <a:p>
             <a:fld id="{51239B6D-5343-43BC-952F-377FEC29E3E9}" type="datetimeFigureOut">
               <a:rPr lang="zh-CN" altLang="en-US" smtClean="0"/>
-              <a:t>2026/3/2</a:t>
+              <a:t>2026/3/4</a:t>
             </a:fld>
             <a:endParaRPr lang="zh-CN" altLang="en-US"/>
           </a:p>
@@ -1076,6 +1076,186 @@
 </p:notes>
 </file>
 
+<file path=ppt/notesSlides/notesSlide13.xml><?xml version="1.0" encoding="utf-8"?>
+<p:notes xmlns:a="http://schemas.openxmlformats.org/drawingml/2006/main" xmlns:r="http://schemas.openxmlformats.org/officeDocument/2006/relationships" xmlns:p="http://schemas.openxmlformats.org/presentationml/2006/main">
+  <p:cSld>
+    <p:spTree>
+      <p:nvGrpSpPr>
+        <p:cNvPr id="1" name=""/>
+        <p:cNvGrpSpPr/>
+        <p:nvPr/>
+      </p:nvGrpSpPr>
+      <p:grpSpPr>
+        <a:xfrm>
+          <a:off x="0" y="0"/>
+          <a:ext cx="0" cy="0"/>
+          <a:chOff x="0" y="0"/>
+          <a:chExt cx="0" cy="0"/>
+        </a:xfrm>
+      </p:grpSpPr>
+      <p:sp>
+        <p:nvSpPr>
+          <p:cNvPr id="2" name="幻灯片图像占位符 1"/>
+          <p:cNvSpPr>
+            <a:spLocks noGrp="1" noRot="1" noChangeAspect="1"/>
+          </p:cNvSpPr>
+          <p:nvPr>
+            <p:ph type="sldImg"/>
+          </p:nvPr>
+        </p:nvSpPr>
+        <p:spPr/>
+      </p:sp>
+      <p:sp>
+        <p:nvSpPr>
+          <p:cNvPr id="3" name="备注占位符 2"/>
+          <p:cNvSpPr>
+            <a:spLocks noGrp="1"/>
+          </p:cNvSpPr>
+          <p:nvPr>
+            <p:ph type="body" idx="1"/>
+          </p:nvPr>
+        </p:nvSpPr>
+        <p:spPr/>
+        <p:txBody>
+          <a:bodyPr/>
+          <a:lstStyle/>
+          <a:p>
+            <a:r>
+              <a:rPr lang="en-US" altLang="zh-CN" dirty="0"/>
+              <a:t>At last, this is a summary of what I do in the project, and some lessons I learned. I would say it’s really a good practice to implement transform from scratch and this make me figure out some details that I thought I understood but I didn’t.</a:t>
+            </a:r>
+            <a:endParaRPr lang="zh-CN" altLang="en-US" dirty="0"/>
+          </a:p>
+        </p:txBody>
+      </p:sp>
+      <p:sp>
+        <p:nvSpPr>
+          <p:cNvPr id="4" name="灯片编号占位符 3"/>
+          <p:cNvSpPr>
+            <a:spLocks noGrp="1"/>
+          </p:cNvSpPr>
+          <p:nvPr>
+            <p:ph type="sldNum" sz="quarter" idx="5"/>
+          </p:nvPr>
+        </p:nvSpPr>
+        <p:spPr/>
+        <p:txBody>
+          <a:bodyPr/>
+          <a:lstStyle/>
+          <a:p>
+            <a:fld id="{EFF4B1BE-1167-42C0-B1A0-F673540500A2}" type="slidenum">
+              <a:rPr lang="zh-CN" altLang="en-US" smtClean="0"/>
+              <a:t>18</a:t>
+            </a:fld>
+            <a:endParaRPr lang="zh-CN" altLang="en-US"/>
+          </a:p>
+        </p:txBody>
+      </p:sp>
+    </p:spTree>
+    <p:extLst>
+      <p:ext uri="{BB962C8B-B14F-4D97-AF65-F5344CB8AC3E}">
+        <p14:creationId xmlns:p14="http://schemas.microsoft.com/office/powerpoint/2010/main" val="2025851928"/>
+      </p:ext>
+    </p:extLst>
+  </p:cSld>
+  <p:clrMapOvr>
+    <a:masterClrMapping/>
+  </p:clrMapOvr>
+</p:notes>
+</file>
+
+<file path=ppt/notesSlides/notesSlide14.xml><?xml version="1.0" encoding="utf-8"?>
+<p:notes xmlns:a="http://schemas.openxmlformats.org/drawingml/2006/main" xmlns:r="http://schemas.openxmlformats.org/officeDocument/2006/relationships" xmlns:p="http://schemas.openxmlformats.org/presentationml/2006/main">
+  <p:cSld>
+    <p:spTree>
+      <p:nvGrpSpPr>
+        <p:cNvPr id="1" name=""/>
+        <p:cNvGrpSpPr/>
+        <p:nvPr/>
+      </p:nvGrpSpPr>
+      <p:grpSpPr>
+        <a:xfrm>
+          <a:off x="0" y="0"/>
+          <a:ext cx="0" cy="0"/>
+          <a:chOff x="0" y="0"/>
+          <a:chExt cx="0" cy="0"/>
+        </a:xfrm>
+      </p:grpSpPr>
+      <p:sp>
+        <p:nvSpPr>
+          <p:cNvPr id="2" name="幻灯片图像占位符 1"/>
+          <p:cNvSpPr>
+            <a:spLocks noGrp="1" noRot="1" noChangeAspect="1"/>
+          </p:cNvSpPr>
+          <p:nvPr>
+            <p:ph type="sldImg"/>
+          </p:nvPr>
+        </p:nvSpPr>
+        <p:spPr/>
+      </p:sp>
+      <p:sp>
+        <p:nvSpPr>
+          <p:cNvPr id="3" name="备注占位符 2"/>
+          <p:cNvSpPr>
+            <a:spLocks noGrp="1"/>
+          </p:cNvSpPr>
+          <p:nvPr>
+            <p:ph type="body" idx="1"/>
+          </p:nvPr>
+        </p:nvSpPr>
+        <p:spPr/>
+        <p:txBody>
+          <a:bodyPr/>
+          <a:lstStyle/>
+          <a:p>
+            <a:r>
+              <a:rPr lang="en-US" altLang="zh-CN" dirty="0"/>
+              <a:t>This is all my presentation. Thank you </a:t>
+            </a:r>
+            <a:r>
+              <a:rPr lang="en-US" altLang="zh-CN"/>
+              <a:t>for listening.</a:t>
+            </a:r>
+            <a:endParaRPr lang="zh-CN" altLang="en-US"/>
+          </a:p>
+        </p:txBody>
+      </p:sp>
+      <p:sp>
+        <p:nvSpPr>
+          <p:cNvPr id="4" name="灯片编号占位符 3"/>
+          <p:cNvSpPr>
+            <a:spLocks noGrp="1"/>
+          </p:cNvSpPr>
+          <p:nvPr>
+            <p:ph type="sldNum" sz="quarter" idx="5"/>
+          </p:nvPr>
+        </p:nvSpPr>
+        <p:spPr/>
+        <p:txBody>
+          <a:bodyPr/>
+          <a:lstStyle/>
+          <a:p>
+            <a:fld id="{EFF4B1BE-1167-42C0-B1A0-F673540500A2}" type="slidenum">
+              <a:rPr lang="zh-CN" altLang="en-US" smtClean="0"/>
+              <a:t>19</a:t>
+            </a:fld>
+            <a:endParaRPr lang="zh-CN" altLang="en-US"/>
+          </a:p>
+        </p:txBody>
+      </p:sp>
+    </p:spTree>
+    <p:extLst>
+      <p:ext uri="{BB962C8B-B14F-4D97-AF65-F5344CB8AC3E}">
+        <p14:creationId xmlns:p14="http://schemas.microsoft.com/office/powerpoint/2010/main" val="1867628394"/>
+      </p:ext>
+    </p:extLst>
+  </p:cSld>
+  <p:clrMapOvr>
+    <a:masterClrMapping/>
+  </p:clrMapOvr>
+</p:notes>
+</file>
+
 <file path=ppt/notesSlides/notesSlide2.xml><?xml version="1.0" encoding="utf-8"?>
 <p:notes xmlns:a="http://schemas.openxmlformats.org/drawingml/2006/main" xmlns:r="http://schemas.openxmlformats.org/officeDocument/2006/relationships" xmlns:p="http://schemas.openxmlformats.org/presentationml/2006/main">
   <p:cSld>
@@ -2005,7 +2185,7 @@
           <a:p>
             <a:fld id="{CD759235-AB21-4573-8877-6F974DD076F2}" type="datetimeFigureOut">
               <a:rPr lang="zh-CN" altLang="en-US" smtClean="0"/>
-              <a:t>2026/3/2</a:t>
+              <a:t>2026/3/4</a:t>
             </a:fld>
             <a:endParaRPr lang="zh-CN" altLang="en-US" dirty="0"/>
           </a:p>
@@ -2388,7 +2568,7 @@
           <a:p>
             <a:fld id="{CD759235-AB21-4573-8877-6F974DD076F2}" type="datetimeFigureOut">
               <a:rPr lang="zh-CN" altLang="en-US" smtClean="0"/>
-              <a:t>2026/3/2</a:t>
+              <a:t>2026/3/4</a:t>
             </a:fld>
             <a:endParaRPr lang="zh-CN" altLang="en-US"/>
           </a:p>
@@ -2676,7 +2856,7 @@
           <a:p>
             <a:fld id="{CD759235-AB21-4573-8877-6F974DD076F2}" type="datetimeFigureOut">
               <a:rPr lang="zh-CN" altLang="en-US" smtClean="0"/>
-              <a:t>2026/3/2</a:t>
+              <a:t>2026/3/4</a:t>
             </a:fld>
             <a:endParaRPr lang="zh-CN" altLang="en-US"/>
           </a:p>
@@ -2874,7 +3054,7 @@
           <a:p>
             <a:fld id="{CD759235-AB21-4573-8877-6F974DD076F2}" type="datetimeFigureOut">
               <a:rPr lang="zh-CN" altLang="en-US" smtClean="0"/>
-              <a:t>2026/3/2</a:t>
+              <a:t>2026/3/4</a:t>
             </a:fld>
             <a:endParaRPr lang="zh-CN" altLang="en-US"/>
           </a:p>
@@ -3082,7 +3262,7 @@
           <a:p>
             <a:fld id="{CD759235-AB21-4573-8877-6F974DD076F2}" type="datetimeFigureOut">
               <a:rPr lang="zh-CN" altLang="en-US" smtClean="0"/>
-              <a:t>2026/3/2</a:t>
+              <a:t>2026/3/4</a:t>
             </a:fld>
             <a:endParaRPr lang="zh-CN" altLang="en-US"/>
           </a:p>
@@ -3247,7 +3427,7 @@
           <a:p>
             <a:fld id="{CD759235-AB21-4573-8877-6F974DD076F2}" type="datetimeFigureOut">
               <a:rPr lang="zh-CN" altLang="en-US" smtClean="0"/>
-              <a:t>2026/3/2</a:t>
+              <a:t>2026/3/4</a:t>
             </a:fld>
             <a:endParaRPr lang="zh-CN" altLang="en-US"/>
           </a:p>
@@ -3592,7 +3772,7 @@
           <a:p>
             <a:fld id="{CD759235-AB21-4573-8877-6F974DD076F2}" type="datetimeFigureOut">
               <a:rPr lang="zh-CN" altLang="en-US" smtClean="0"/>
-              <a:t>2026/3/2</a:t>
+              <a:t>2026/3/4</a:t>
             </a:fld>
             <a:endParaRPr lang="zh-CN" altLang="en-US"/>
           </a:p>
@@ -3882,7 +4062,7 @@
           <a:p>
             <a:fld id="{CD759235-AB21-4573-8877-6F974DD076F2}" type="datetimeFigureOut">
               <a:rPr lang="zh-CN" altLang="en-US" smtClean="0"/>
-              <a:t>2026/3/2</a:t>
+              <a:t>2026/3/4</a:t>
             </a:fld>
             <a:endParaRPr lang="zh-CN" altLang="en-US"/>
           </a:p>
@@ -4305,7 +4485,7 @@
           <a:p>
             <a:fld id="{CD759235-AB21-4573-8877-6F974DD076F2}" type="datetimeFigureOut">
               <a:rPr lang="zh-CN" altLang="en-US" smtClean="0"/>
-              <a:t>2026/3/2</a:t>
+              <a:t>2026/3/4</a:t>
             </a:fld>
             <a:endParaRPr lang="zh-CN" altLang="en-US"/>
           </a:p>
@@ -4777,7 +4957,7 @@
           <a:p>
             <a:fld id="{CD759235-AB21-4573-8877-6F974DD076F2}" type="datetimeFigureOut">
               <a:rPr lang="zh-CN" altLang="en-US" smtClean="0"/>
-              <a:t>2026/3/2</a:t>
+              <a:t>2026/3/4</a:t>
             </a:fld>
             <a:endParaRPr lang="zh-CN" altLang="en-US"/>
           </a:p>
@@ -4983,7 +5163,7 @@
           <a:p>
             <a:fld id="{CD759235-AB21-4573-8877-6F974DD076F2}" type="datetimeFigureOut">
               <a:rPr lang="zh-CN" altLang="en-US" smtClean="0"/>
-              <a:t>2026/3/2</a:t>
+              <a:t>2026/3/4</a:t>
             </a:fld>
             <a:endParaRPr lang="zh-CN" altLang="en-US"/>
           </a:p>
@@ -5189,7 +5369,7 @@
           <a:p>
             <a:fld id="{CD759235-AB21-4573-8877-6F974DD076F2}" type="datetimeFigureOut">
               <a:rPr lang="zh-CN" altLang="en-US" smtClean="0"/>
-              <a:t>2026/3/2</a:t>
+              <a:t>2026/3/4</a:t>
             </a:fld>
             <a:endParaRPr lang="zh-CN" altLang="en-US"/>
           </a:p>
@@ -5416,7 +5596,7 @@
           <a:p>
             <a:fld id="{CD759235-AB21-4573-8877-6F974DD076F2}" type="datetimeFigureOut">
               <a:rPr lang="zh-CN" altLang="en-US" smtClean="0"/>
-              <a:t>2026/3/2</a:t>
+              <a:t>2026/3/4</a:t>
             </a:fld>
             <a:endParaRPr lang="zh-CN" altLang="en-US"/>
           </a:p>
@@ -5657,7 +5837,7 @@
           <a:p>
             <a:fld id="{CD759235-AB21-4573-8877-6F974DD076F2}" type="datetimeFigureOut">
               <a:rPr lang="zh-CN" altLang="en-US" smtClean="0"/>
-              <a:t>2026/3/2</a:t>
+              <a:t>2026/3/4</a:t>
             </a:fld>
             <a:endParaRPr lang="zh-CN" altLang="en-US"/>
           </a:p>
@@ -7307,7 +7487,7 @@
             <p:ph idx="1"/>
             <p:extLst>
               <p:ext uri="{D42A27DB-BD31-4B8C-83A1-F6EECF244321}">
-                <p14:modId xmlns:p14="http://schemas.microsoft.com/office/powerpoint/2010/main" val="2081142105"/>
+                <p14:modId xmlns:p14="http://schemas.microsoft.com/office/powerpoint/2010/main" val="3719876754"/>
               </p:ext>
             </p:extLst>
           </p:nvPr>
@@ -7501,7 +7681,7 @@
                       <a:pPr algn="ctr"/>
                       <a:r>
                         <a:rPr lang="en-US" altLang="zh-CN" dirty="0"/>
-                        <a:t>41.4%</a:t>
+                        <a:t>46.4%</a:t>
                       </a:r>
                       <a:endParaRPr lang="zh-CN" altLang="en-US" dirty="0"/>
                     </a:p>
@@ -7520,7 +7700,7 @@
                       <a:pPr algn="ctr"/>
                       <a:r>
                         <a:rPr lang="en-US" altLang="zh-CN" dirty="0"/>
-                        <a:t>83.8%</a:t>
+                        <a:t>88.4%</a:t>
                       </a:r>
                       <a:endParaRPr lang="zh-CN" altLang="en-US" dirty="0"/>
                     </a:p>
@@ -7569,7 +7749,7 @@
                       <a:pPr algn="ctr"/>
                       <a:r>
                         <a:rPr lang="en-US" altLang="zh-CN" dirty="0"/>
-                        <a:t>43.4%</a:t>
+                        <a:t>46.6%</a:t>
                       </a:r>
                       <a:endParaRPr lang="zh-CN" altLang="en-US" dirty="0"/>
                     </a:p>
@@ -7588,7 +7768,7 @@
                       <a:pPr algn="ctr"/>
                       <a:r>
                         <a:rPr lang="en-US" altLang="zh-CN" dirty="0"/>
-                        <a:t>87.8%</a:t>
+                        <a:t>87.2%</a:t>
                       </a:r>
                       <a:endParaRPr lang="zh-CN" altLang="en-US" dirty="0"/>
                     </a:p>
